--- a/material/[SeSAC_YDP_6] 05_반응형웹.pptx
+++ b/material/[SeSAC_YDP_6] 05_반응형웹.pptx
@@ -221,7 +221,7 @@
             <a:fld id="{6CF29A9B-32B2-49A0-9A50-441B26F8BC3C}" type="datetimeFigureOut">
               <a:rPr lang="ko-KR" altLang="en-US" smtClean="0"/>
               <a:pPr/>
-              <a:t>2024-06-02</a:t>
+              <a:t>2024-06-18</a:t>
             </a:fld>
             <a:endParaRPr lang="ko-KR" altLang="en-US" dirty="0"/>
           </a:p>
@@ -683,12 +683,8 @@
           </a:p>
           <a:p>
             <a:r>
-              <a:rPr lang="ko-KR" altLang="en-US" dirty="0" smtClean="0"/>
-              <a:t>크기 규칙</a:t>
-            </a:r>
-            <a:r>
-              <a:rPr lang="ko-KR" altLang="en-US" dirty="0" smtClean="0"/>
-              <a:t>에</a:t>
+              <a:rPr lang="ko-KR" altLang="en-US" dirty="0"/>
+              <a:t>크기 규칙에</a:t>
             </a:r>
             <a:endParaRPr lang="en-US" altLang="ko-KR" dirty="0"/>
           </a:p>
@@ -795,37 +791,37 @@
           <a:lstStyle/>
           <a:p>
             <a:r>
-              <a:rPr lang="en-US" altLang="ko-KR" dirty="0" smtClean="0"/>
+              <a:rPr lang="en-US" altLang="ko-KR" dirty="0"/>
               <a:t>Max</a:t>
             </a:r>
             <a:r>
-              <a:rPr lang="ko-KR" altLang="en-US" dirty="0" smtClean="0"/>
+              <a:rPr lang="ko-KR" altLang="en-US" dirty="0"/>
               <a:t>가 이하</a:t>
             </a:r>
-            <a:endParaRPr lang="en-US" altLang="ko-KR" dirty="0" smtClean="0"/>
-          </a:p>
-          <a:p>
-            <a:r>
-              <a:rPr lang="en-US" altLang="ko-KR" dirty="0" smtClean="0"/>
+            <a:endParaRPr lang="en-US" altLang="ko-KR" dirty="0"/>
+          </a:p>
+          <a:p>
+            <a:r>
+              <a:rPr lang="en-US" altLang="ko-KR" dirty="0"/>
               <a:t>Min</a:t>
             </a:r>
             <a:r>
-              <a:rPr lang="ko-KR" altLang="en-US" dirty="0" smtClean="0"/>
+              <a:rPr lang="ko-KR" altLang="en-US" dirty="0"/>
               <a:t>이 이상</a:t>
             </a:r>
-            <a:endParaRPr lang="en-US" altLang="ko-KR" dirty="0" smtClean="0"/>
-          </a:p>
-          <a:p>
-            <a:r>
-              <a:rPr lang="ko-KR" altLang="en-US" dirty="0" smtClean="0"/>
+            <a:endParaRPr lang="en-US" altLang="ko-KR" dirty="0"/>
+          </a:p>
+          <a:p>
+            <a:r>
+              <a:rPr lang="ko-KR" altLang="en-US" dirty="0"/>
               <a:t>잘 </a:t>
             </a:r>
             <a:r>
-              <a:rPr lang="ko-KR" altLang="en-US" dirty="0" err="1" smtClean="0"/>
+              <a:rPr lang="ko-KR" altLang="en-US" dirty="0" err="1"/>
               <a:t>봐둘것</a:t>
             </a:r>
             <a:r>
-              <a:rPr lang="en-US" altLang="ko-KR" dirty="0" smtClean="0"/>
+              <a:rPr lang="en-US" altLang="ko-KR" dirty="0"/>
               <a:t>.</a:t>
             </a:r>
             <a:endParaRPr lang="ko-KR" altLang="en-US" dirty="0"/>
@@ -2450,13 +2446,9 @@
             </a:r>
             <a:r>
               <a:rPr lang="ko-KR" altLang="en-US" dirty="0"/>
-              <a:t> 너비 </a:t>
-            </a:r>
-            <a:r>
-              <a:rPr lang="ko-KR" altLang="en-US" dirty="0" smtClean="0"/>
-              <a:t>설정</a:t>
-            </a:r>
-            <a:endParaRPr lang="en-US" altLang="ko-KR" dirty="0" smtClean="0"/>
+              <a:t> 너비 설정</a:t>
+            </a:r>
+            <a:endParaRPr lang="en-US" altLang="ko-KR" dirty="0"/>
           </a:p>
           <a:p>
             <a:pPr marL="0" marR="0" indent="0" algn="l" defTabSz="914400" rtl="0" eaLnBrk="1" fontAlgn="auto" latinLnBrk="1" hangingPunct="1">
@@ -2477,22 +2469,14 @@
               <a:defRPr/>
             </a:pPr>
             <a:r>
-              <a:rPr lang="en-US" altLang="ko-KR" dirty="0" smtClean="0"/>
-              <a:t>device-width </a:t>
-            </a:r>
-            <a:r>
               <a:rPr lang="en-US" altLang="ko-KR" dirty="0"/>
-              <a:t>: </a:t>
-            </a:r>
-            <a:r>
-              <a:rPr lang="ko-KR" altLang="en-US" dirty="0"/>
-              <a:t>기기의 화면 너비에 맞게 </a:t>
-            </a:r>
-            <a:r>
-              <a:rPr lang="ko-KR" altLang="en-US" dirty="0" smtClean="0"/>
-              <a:t>설정</a:t>
-            </a:r>
-            <a:endParaRPr lang="en-US" altLang="ko-KR" dirty="0" smtClean="0"/>
+              <a:t>device-width : </a:t>
+            </a:r>
+            <a:r>
+              <a:rPr lang="ko-KR" altLang="en-US" dirty="0"/>
+              <a:t>기기의 화면 너비에 맞게 설정</a:t>
+            </a:r>
+            <a:endParaRPr lang="en-US" altLang="ko-KR" dirty="0"/>
           </a:p>
           <a:p>
             <a:pPr marL="0" marR="0" indent="0" algn="l" defTabSz="914400" rtl="0" eaLnBrk="1" fontAlgn="auto" latinLnBrk="1" hangingPunct="1">
@@ -2870,7 +2854,7 @@
           <a:lstStyle/>
           <a:p>
             <a:r>
-              <a:rPr lang="en-US" altLang="ko-KR" dirty="0" smtClean="0"/>
+              <a:rPr lang="en-US" altLang="ko-KR" dirty="0"/>
               <a:t>Device</a:t>
             </a:r>
           </a:p>
@@ -2880,33 +2864,33 @@
               <a:buChar char="-"/>
             </a:pPr>
             <a:r>
-              <a:rPr lang="ko-KR" altLang="en-US" baseline="0" dirty="0" smtClean="0"/>
+              <a:rPr lang="ko-KR" altLang="en-US" baseline="0" dirty="0"/>
               <a:t>스마트폰</a:t>
             </a:r>
             <a:r>
-              <a:rPr lang="en-US" altLang="ko-KR" baseline="0" dirty="0" smtClean="0"/>
+              <a:rPr lang="en-US" altLang="ko-KR" baseline="0" dirty="0"/>
               <a:t>, </a:t>
             </a:r>
             <a:r>
-              <a:rPr lang="ko-KR" altLang="en-US" baseline="0" dirty="0" smtClean="0"/>
+              <a:rPr lang="ko-KR" altLang="en-US" baseline="0" dirty="0"/>
               <a:t>태블릿</a:t>
             </a:r>
             <a:r>
-              <a:rPr lang="en-US" altLang="ko-KR" baseline="0" dirty="0" smtClean="0"/>
+              <a:rPr lang="en-US" altLang="ko-KR" baseline="0" dirty="0"/>
               <a:t>, </a:t>
             </a:r>
             <a:r>
-              <a:rPr lang="ko-KR" altLang="en-US" baseline="0" dirty="0" smtClean="0"/>
+              <a:rPr lang="ko-KR" altLang="en-US" baseline="0" dirty="0"/>
               <a:t>데스크톱 모니터 등 특정 장치의 물리적인 화면 크기와 해상도</a:t>
             </a:r>
-            <a:endParaRPr lang="en-US" altLang="ko-KR" baseline="0" dirty="0" smtClean="0"/>
+            <a:endParaRPr lang="en-US" altLang="ko-KR" baseline="0" dirty="0"/>
           </a:p>
           <a:p>
             <a:pPr marL="171450" indent="-171450">
               <a:buFontTx/>
               <a:buChar char="-"/>
             </a:pPr>
-            <a:endParaRPr lang="en-US" altLang="ko-KR" baseline="0" dirty="0" smtClean="0"/>
+            <a:endParaRPr lang="en-US" altLang="ko-KR" baseline="0" dirty="0"/>
           </a:p>
           <a:p>
             <a:pPr marL="0" indent="0">
@@ -2914,7 +2898,7 @@
               <a:buNone/>
             </a:pPr>
             <a:r>
-              <a:rPr lang="en-US" altLang="ko-KR" baseline="0" dirty="0" smtClean="0"/>
+              <a:rPr lang="en-US" altLang="ko-KR" baseline="0" dirty="0"/>
               <a:t>Browser</a:t>
             </a:r>
           </a:p>
@@ -2924,80 +2908,76 @@
               <a:buChar char="-"/>
             </a:pPr>
             <a:r>
-              <a:rPr lang="ko-KR" altLang="en-US" baseline="0" dirty="0" smtClean="0"/>
+              <a:rPr lang="ko-KR" altLang="en-US" baseline="0" dirty="0"/>
               <a:t>웹 브라우저의 창 크기</a:t>
             </a:r>
-            <a:r>
-              <a:rPr lang="en-US" altLang="ko-KR" baseline="0" dirty="0" smtClean="0"/>
-              <a:t/>
-            </a:r>
             <a:br>
-              <a:rPr lang="en-US" altLang="ko-KR" baseline="0" dirty="0" smtClean="0"/>
+              <a:rPr lang="en-US" altLang="ko-KR" baseline="0" dirty="0"/>
             </a:br>
             <a:r>
-              <a:rPr lang="en-US" altLang="ko-KR" baseline="0" dirty="0" smtClean="0"/>
+              <a:rPr lang="en-US" altLang="ko-KR" baseline="0" dirty="0"/>
               <a:t>- </a:t>
             </a:r>
             <a:r>
-              <a:rPr lang="ko-KR" altLang="en-US" baseline="0" dirty="0" smtClean="0"/>
+              <a:rPr lang="ko-KR" altLang="en-US" baseline="0" dirty="0"/>
               <a:t>사용자가 창을 얼마나 크게 또는 작게 </a:t>
             </a:r>
             <a:r>
-              <a:rPr lang="ko-KR" altLang="en-US" baseline="0" dirty="0" err="1" smtClean="0"/>
+              <a:rPr lang="ko-KR" altLang="en-US" baseline="0" dirty="0" err="1"/>
               <a:t>조정했느냐에</a:t>
             </a:r>
             <a:r>
-              <a:rPr lang="ko-KR" altLang="en-US" baseline="0" dirty="0" smtClean="0"/>
+              <a:rPr lang="ko-KR" altLang="en-US" baseline="0" dirty="0"/>
               <a:t> 따라 달라짐</a:t>
             </a:r>
             <a:r>
-              <a:rPr lang="en-US" altLang="ko-KR" baseline="0" dirty="0" smtClean="0"/>
+              <a:rPr lang="en-US" altLang="ko-KR" baseline="0" dirty="0"/>
               <a:t>. / </a:t>
             </a:r>
             <a:r>
-              <a:rPr lang="ko-KR" altLang="en-US" baseline="0" dirty="0" smtClean="0"/>
+              <a:rPr lang="ko-KR" altLang="en-US" baseline="0" dirty="0"/>
               <a:t>주소 표시줄</a:t>
             </a:r>
             <a:r>
-              <a:rPr lang="en-US" altLang="ko-KR" baseline="0" dirty="0" smtClean="0"/>
+              <a:rPr lang="en-US" altLang="ko-KR" baseline="0" dirty="0"/>
               <a:t>, </a:t>
             </a:r>
             <a:r>
-              <a:rPr lang="ko-KR" altLang="en-US" baseline="0" dirty="0" err="1" smtClean="0"/>
+              <a:rPr lang="ko-KR" altLang="en-US" baseline="0" dirty="0" err="1"/>
               <a:t>북마크</a:t>
             </a:r>
             <a:r>
-              <a:rPr lang="ko-KR" altLang="en-US" baseline="0" dirty="0" smtClean="0"/>
+              <a:rPr lang="ko-KR" altLang="en-US" baseline="0" dirty="0"/>
               <a:t> 바</a:t>
             </a:r>
             <a:r>
-              <a:rPr lang="en-US" altLang="ko-KR" baseline="0" dirty="0" smtClean="0"/>
+              <a:rPr lang="en-US" altLang="ko-KR" baseline="0" dirty="0"/>
               <a:t>, </a:t>
             </a:r>
             <a:r>
-              <a:rPr lang="ko-KR" altLang="en-US" baseline="0" dirty="0" err="1" smtClean="0"/>
+              <a:rPr lang="ko-KR" altLang="en-US" baseline="0" dirty="0" err="1"/>
               <a:t>스크롤바</a:t>
             </a:r>
             <a:r>
-              <a:rPr lang="ko-KR" altLang="en-US" baseline="0" dirty="0" smtClean="0"/>
+              <a:rPr lang="ko-KR" altLang="en-US" baseline="0" dirty="0"/>
               <a:t> 등 자체의 </a:t>
             </a:r>
             <a:r>
-              <a:rPr lang="en-US" altLang="ko-KR" baseline="0" dirty="0" smtClean="0"/>
+              <a:rPr lang="en-US" altLang="ko-KR" baseline="0" dirty="0"/>
               <a:t>UI </a:t>
             </a:r>
             <a:r>
-              <a:rPr lang="ko-KR" altLang="en-US" baseline="0" dirty="0" smtClean="0"/>
+              <a:rPr lang="ko-KR" altLang="en-US" baseline="0" dirty="0"/>
               <a:t>요소가 포함</a:t>
             </a:r>
-            <a:endParaRPr lang="en-US" altLang="ko-KR" baseline="0" dirty="0" smtClean="0"/>
+            <a:endParaRPr lang="en-US" altLang="ko-KR" baseline="0" dirty="0"/>
           </a:p>
           <a:p>
             <a:pPr marL="171450" indent="-171450">
               <a:buFontTx/>
               <a:buChar char="-"/>
             </a:pPr>
-            <a:endParaRPr lang="en-US" altLang="ko-KR" baseline="0" dirty="0" smtClean="0"/>
+            <a:endParaRPr lang="en-US" altLang="ko-KR" baseline="0" dirty="0"/>
           </a:p>
           <a:p>
             <a:pPr marL="0" indent="0">
@@ -3005,7 +2985,7 @@
               <a:buNone/>
             </a:pPr>
             <a:r>
-              <a:rPr lang="en-US" altLang="ko-KR" baseline="0" dirty="0" smtClean="0"/>
+              <a:rPr lang="en-US" altLang="ko-KR" baseline="0" dirty="0"/>
               <a:t>Viewport</a:t>
             </a:r>
           </a:p>
@@ -3015,14 +2995,14 @@
               <a:buNone/>
             </a:pPr>
             <a:r>
-              <a:rPr lang="en-US" altLang="ko-KR" baseline="0" dirty="0" smtClean="0"/>
+              <a:rPr lang="en-US" altLang="ko-KR" baseline="0" dirty="0"/>
               <a:t>- </a:t>
             </a:r>
             <a:r>
-              <a:rPr lang="ko-KR" altLang="en-US" baseline="0" dirty="0" smtClean="0"/>
+              <a:rPr lang="ko-KR" altLang="en-US" baseline="0" dirty="0"/>
               <a:t>브라우저 창 내에서 실제 웹 페이지 콘텐츠가 표시되는 영역</a:t>
             </a:r>
-            <a:endParaRPr lang="en-US" altLang="ko-KR" baseline="0" dirty="0" smtClean="0"/>
+            <a:endParaRPr lang="en-US" altLang="ko-KR" baseline="0" dirty="0"/>
           </a:p>
           <a:p>
             <a:pPr marL="0" indent="0">
@@ -3030,23 +3010,23 @@
               <a:buNone/>
             </a:pPr>
             <a:r>
-              <a:rPr lang="en-US" altLang="ko-KR" baseline="0" dirty="0" smtClean="0"/>
+              <a:rPr lang="en-US" altLang="ko-KR" baseline="0" dirty="0"/>
               <a:t>- </a:t>
             </a:r>
             <a:r>
-              <a:rPr lang="ko-KR" altLang="en-US" baseline="0" dirty="0" smtClean="0"/>
+              <a:rPr lang="ko-KR" altLang="en-US" baseline="0" dirty="0"/>
               <a:t>위에 </a:t>
             </a:r>
             <a:r>
-              <a:rPr lang="en-US" altLang="ko-KR" baseline="0" dirty="0" smtClean="0"/>
+              <a:rPr lang="en-US" altLang="ko-KR" baseline="0" dirty="0"/>
               <a:t>UI </a:t>
             </a:r>
             <a:r>
-              <a:rPr lang="ko-KR" altLang="en-US" baseline="0" dirty="0" smtClean="0"/>
+              <a:rPr lang="ko-KR" altLang="en-US" baseline="0" dirty="0"/>
               <a:t>요소 제외</a:t>
             </a:r>
             <a:r>
-              <a:rPr lang="en-US" altLang="ko-KR" baseline="0" dirty="0" smtClean="0"/>
+              <a:rPr lang="en-US" altLang="ko-KR" baseline="0" dirty="0"/>
               <a:t>.</a:t>
             </a:r>
             <a:endParaRPr lang="ko-KR" altLang="en-US" dirty="0"/>
@@ -6990,16 +6970,14 @@
           <a:p>
             <a:r>
               <a:rPr lang="en-US" altLang="ko-KR" dirty="0" err="1"/>
-              <a:t>SeSAC</a:t>
-            </a:r>
-            <a:r>
-              <a:rPr lang="en-US" altLang="ko-KR" dirty="0"/>
-              <a:t> x </a:t>
-            </a:r>
-            <a:r>
-              <a:rPr lang="en-US" altLang="ko-KR" dirty="0" err="1"/>
-              <a:t>CODINGOn</a:t>
-            </a:r>
+              <a:t>CodingOn</a:t>
+            </a:r>
+            <a:endParaRPr lang="ko-KR" altLang="en-US"/>
+          </a:p>
+          <a:p>
+            <a:endParaRPr lang="ko-KR" altLang="en-US" dirty="0"/>
+          </a:p>
+          <a:p>
             <a:endParaRPr lang="ko-KR" altLang="en-US" dirty="0"/>
           </a:p>
           <a:p>
@@ -7066,13 +7044,6 @@
   <p:clrMapOvr>
     <a:masterClrMapping/>
   </p:clrMapOvr>
-  <p:timing>
-    <p:tnLst>
-      <p:par>
-        <p:cTn id="1" dur="indefinite" restart="never" nodeType="tmRoot"/>
-      </p:par>
-    </p:tnLst>
-  </p:timing>
 </p:sld>
 </file>
 
@@ -7154,7 +7125,7 @@
               <a:rPr lang="ko-KR" altLang="en-US" dirty="0"/>
               <a:t>를 </a:t>
             </a:r>
-            <a:endParaRPr lang="en-US" altLang="ko-KR" dirty="0" smtClean="0"/>
+            <a:endParaRPr lang="en-US" altLang="ko-KR" dirty="0"/>
           </a:p>
           <a:p>
             <a:pPr marL="0" indent="0">
@@ -7165,19 +7136,11 @@
             </a:pPr>
             <a:r>
               <a:rPr lang="en-US" altLang="ko-KR" dirty="0"/>
-              <a:t> </a:t>
-            </a:r>
-            <a:r>
-              <a:rPr lang="en-US" altLang="ko-KR" dirty="0" smtClean="0"/>
-              <a:t> </a:t>
-            </a:r>
-            <a:r>
-              <a:rPr lang="ko-KR" altLang="en-US" dirty="0" smtClean="0"/>
-              <a:t>지정하게 </a:t>
-            </a:r>
-            <a:r>
-              <a:rPr lang="ko-KR" altLang="en-US" dirty="0"/>
-              <a:t>하는 기술</a:t>
+              <a:t>  </a:t>
+            </a:r>
+            <a:r>
+              <a:rPr lang="ko-KR" altLang="en-US" dirty="0"/>
+              <a:t>지정하게 하는 기술</a:t>
             </a:r>
             <a:endParaRPr lang="en-US" altLang="ko-KR" dirty="0"/>
           </a:p>
@@ -7270,13 +7233,6 @@
   <p:clrMapOvr>
     <a:masterClrMapping/>
   </p:clrMapOvr>
-  <p:timing>
-    <p:tnLst>
-      <p:par>
-        <p:cTn id="1" dur="indefinite" restart="never" nodeType="tmRoot"/>
-      </p:par>
-    </p:tnLst>
-  </p:timing>
 </p:sld>
 </file>
 
@@ -7638,13 +7594,6 @@
   <p:clrMapOvr>
     <a:masterClrMapping/>
   </p:clrMapOvr>
-  <p:timing>
-    <p:tnLst>
-      <p:par>
-        <p:cTn id="1" dur="indefinite" restart="never" nodeType="tmRoot"/>
-      </p:par>
-    </p:tnLst>
-  </p:timing>
 </p:sld>
 </file>
 
@@ -8130,7 +8079,7 @@
               </a:rPr>
               <a:t>을 </a:t>
             </a:r>
-            <a:endParaRPr lang="en-US" altLang="ko-KR" b="1" dirty="0" smtClean="0">
+            <a:endParaRPr lang="en-US" altLang="ko-KR" b="1" dirty="0">
               <a:solidFill>
                 <a:schemeClr val="accent1"/>
               </a:solidFill>
@@ -8146,26 +8095,18 @@
                   <a:schemeClr val="accent1"/>
                 </a:solidFill>
               </a:rPr>
-              <a:t> </a:t>
-            </a:r>
-            <a:r>
-              <a:rPr lang="en-US" altLang="ko-KR" b="1" dirty="0" smtClean="0">
+              <a:t>  </a:t>
+            </a:r>
+            <a:r>
+              <a:rPr lang="ko-KR" altLang="en-US" b="1" dirty="0">
                 <a:solidFill>
                   <a:schemeClr val="accent1"/>
                 </a:solidFill>
               </a:rPr>
-              <a:t> </a:t>
-            </a:r>
-            <a:r>
-              <a:rPr lang="ko-KR" altLang="en-US" b="1" dirty="0" smtClean="0">
-                <a:solidFill>
-                  <a:schemeClr val="accent1"/>
-                </a:solidFill>
-              </a:rPr>
               <a:t>변경</a:t>
             </a:r>
             <a:r>
-              <a:rPr lang="ko-KR" altLang="en-US" dirty="0" smtClean="0"/>
+              <a:rPr lang="ko-KR" altLang="en-US" dirty="0"/>
               <a:t>함</a:t>
             </a:r>
             <a:endParaRPr lang="en-US" altLang="ko-KR" dirty="0"/>
@@ -8431,13 +8372,6 @@
   <p:clrMapOvr>
     <a:masterClrMapping/>
   </p:clrMapOvr>
-  <p:timing>
-    <p:tnLst>
-      <p:par>
-        <p:cTn id="1" dur="indefinite" restart="never" nodeType="tmRoot"/>
-      </p:par>
-    </p:tnLst>
-  </p:timing>
 </p:sld>
 </file>
 
@@ -8755,13 +8689,6 @@
   <p:clrMapOvr>
     <a:masterClrMapping/>
   </p:clrMapOvr>
-  <p:timing>
-    <p:tnLst>
-      <p:par>
-        <p:cTn id="1" dur="indefinite" restart="never" nodeType="tmRoot"/>
-      </p:par>
-    </p:tnLst>
-  </p:timing>
 </p:sld>
 </file>
 
@@ -9179,7 +9106,7 @@
           <a:p>
             <a:fld id="{0F78D9C4-20C1-4B15-A116-16DC77AD9A1E}" type="datetime1">
               <a:rPr lang="ko-KR" altLang="en-US" smtClean="0"/>
-              <a:t>2024-06-02</a:t>
+              <a:t>2024-06-18</a:t>
             </a:fld>
             <a:endParaRPr lang="ko-KR" altLang="en-US"/>
           </a:p>
@@ -9252,10 +9179,9 @@
               <a:t>.  </a:t>
             </a:r>
             <a:r>
-              <a:rPr lang="ko-KR" altLang="en-US" dirty="0" smtClean="0"/>
+              <a:rPr lang="ko-KR" altLang="en-US" dirty="0"/>
               <a:t>크기에 따라 자리 바꾸기</a:t>
             </a:r>
-            <a:endParaRPr lang="ko-KR" altLang="en-US" dirty="0"/>
           </a:p>
         </p:txBody>
       </p:sp>
@@ -9529,15 +9455,6 @@
               </a:rPr>
               <a:t>강의 클릭</a:t>
             </a:r>
-            <a:r>
-              <a:rPr lang="en-US" altLang="ko-KR" dirty="0">
-                <a:solidFill>
-                  <a:srgbClr val="212529"/>
-                </a:solidFill>
-                <a:latin typeface="+mn-ea"/>
-              </a:rPr>
-              <a:t/>
-            </a:r>
             <a:br>
               <a:rPr lang="en-US" altLang="ko-KR" dirty="0">
                 <a:solidFill>
@@ -9565,7 +9482,7 @@
               <a:t>➡ </a:t>
             </a:r>
             <a:r>
-              <a:rPr lang="en-US" altLang="ko-KR" sz="2800" b="1" dirty="0" smtClean="0">
+              <a:rPr lang="en-US" altLang="ko-KR" sz="2800" b="1" dirty="0">
                 <a:solidFill>
                   <a:srgbClr val="212529"/>
                 </a:solidFill>
@@ -9574,7 +9491,7 @@
               <a:t>[CSS media query </a:t>
             </a:r>
             <a:r>
-              <a:rPr lang="ko-KR" altLang="en-US" sz="2800" b="1" dirty="0" smtClean="0">
+              <a:rPr lang="ko-KR" altLang="en-US" sz="2800" b="1" dirty="0">
                 <a:solidFill>
                   <a:srgbClr val="212529"/>
                 </a:solidFill>
@@ -9583,7 +9500,7 @@
               <a:t>실습</a:t>
             </a:r>
             <a:r>
-              <a:rPr lang="en-US" altLang="ko-KR" sz="2800" b="1" dirty="0" smtClean="0">
+              <a:rPr lang="en-US" altLang="ko-KR" sz="2800" b="1" dirty="0">
                 <a:solidFill>
                   <a:srgbClr val="212529"/>
                 </a:solidFill>
@@ -9592,7 +9509,7 @@
               <a:t>]</a:t>
             </a:r>
             <a:r>
-              <a:rPr lang="en-US" altLang="ko-KR" sz="2800" dirty="0" smtClean="0">
+              <a:rPr lang="en-US" altLang="ko-KR" sz="2800" dirty="0">
                 <a:solidFill>
                   <a:srgbClr val="212529"/>
                 </a:solidFill>
@@ -9637,7 +9554,7 @@
               <a:t>[</a:t>
             </a:r>
             <a:r>
-              <a:rPr lang="ko-KR" altLang="en-US" sz="2800" b="1" dirty="0" err="1" smtClean="0">
+              <a:rPr lang="ko-KR" altLang="en-US" sz="2800" b="1" dirty="0" err="1">
                 <a:solidFill>
                   <a:schemeClr val="accent1"/>
                 </a:solidFill>
@@ -9646,7 +9563,7 @@
               <a:t>실습문제</a:t>
             </a:r>
             <a:r>
-              <a:rPr lang="en-US" altLang="ko-KR" sz="2800" b="1" dirty="0" smtClean="0">
+              <a:rPr lang="en-US" altLang="ko-KR" sz="2800" b="1" dirty="0">
                 <a:solidFill>
                   <a:schemeClr val="accent1"/>
                 </a:solidFill>
@@ -9655,7 +9572,7 @@
               <a:t>1]</a:t>
             </a:r>
             <a:r>
-              <a:rPr lang="en-US" altLang="ko-KR" sz="2800" dirty="0" smtClean="0">
+              <a:rPr lang="en-US" altLang="ko-KR" sz="2800" dirty="0">
                 <a:solidFill>
                   <a:schemeClr val="accent1"/>
                 </a:solidFill>
@@ -9664,22 +9581,13 @@
               <a:t> </a:t>
             </a:r>
             <a:r>
-              <a:rPr lang="ko-KR" altLang="en-US" sz="2800" dirty="0" smtClean="0">
+              <a:rPr lang="ko-KR" altLang="en-US" sz="2800" dirty="0">
                 <a:solidFill>
                   <a:srgbClr val="212529"/>
                 </a:solidFill>
                 <a:latin typeface="+mn-ea"/>
               </a:rPr>
-              <a:t> </a:t>
-            </a:r>
-            <a:r>
-              <a:rPr lang="ko-KR" altLang="en-US" sz="2800" dirty="0">
-                <a:solidFill>
-                  <a:srgbClr val="212529"/>
-                </a:solidFill>
-                <a:latin typeface="+mn-ea"/>
-              </a:rPr>
-              <a:t>진행</a:t>
+              <a:t> 진행</a:t>
             </a:r>
           </a:p>
         </p:txBody>
@@ -9778,7 +9686,7 @@
           <a:p>
             <a:fld id="{0F78D9C4-20C1-4B15-A116-16DC77AD9A1E}" type="datetime1">
               <a:rPr lang="ko-KR" altLang="en-US" smtClean="0"/>
-              <a:t>2024-06-02</a:t>
+              <a:t>2024-06-18</a:t>
             </a:fld>
             <a:endParaRPr lang="ko-KR" altLang="en-US"/>
           </a:p>
@@ -9851,14 +9759,13 @@
               <a:t>.  </a:t>
             </a:r>
             <a:r>
-              <a:rPr lang="en-US" altLang="ko-KR" dirty="0" smtClean="0"/>
+              <a:rPr lang="en-US" altLang="ko-KR" dirty="0"/>
               <a:t>Header </a:t>
             </a:r>
             <a:r>
-              <a:rPr lang="ko-KR" altLang="en-US" dirty="0" smtClean="0"/>
+              <a:rPr lang="ko-KR" altLang="en-US" dirty="0"/>
               <a:t>만들기</a:t>
             </a:r>
-            <a:endParaRPr lang="ko-KR" altLang="en-US" dirty="0"/>
           </a:p>
         </p:txBody>
       </p:sp>
@@ -10132,15 +10039,6 @@
               </a:rPr>
               <a:t>강의 클릭</a:t>
             </a:r>
-            <a:r>
-              <a:rPr lang="en-US" altLang="ko-KR" dirty="0">
-                <a:solidFill>
-                  <a:srgbClr val="212529"/>
-                </a:solidFill>
-                <a:latin typeface="+mn-ea"/>
-              </a:rPr>
-              <a:t/>
-            </a:r>
             <a:br>
               <a:rPr lang="en-US" altLang="ko-KR" dirty="0">
                 <a:solidFill>
@@ -10168,7 +10066,7 @@
               <a:t>➡ </a:t>
             </a:r>
             <a:r>
-              <a:rPr lang="en-US" altLang="ko-KR" sz="2800" b="1" dirty="0" smtClean="0">
+              <a:rPr lang="en-US" altLang="ko-KR" sz="2800" b="1" dirty="0">
                 <a:solidFill>
                   <a:srgbClr val="212529"/>
                 </a:solidFill>
@@ -10177,7 +10075,7 @@
               <a:t>[CSS media query </a:t>
             </a:r>
             <a:r>
-              <a:rPr lang="ko-KR" altLang="en-US" sz="2800" b="1" dirty="0" smtClean="0">
+              <a:rPr lang="ko-KR" altLang="en-US" sz="2800" b="1" dirty="0">
                 <a:solidFill>
                   <a:srgbClr val="212529"/>
                 </a:solidFill>
@@ -10186,7 +10084,7 @@
               <a:t>실습</a:t>
             </a:r>
             <a:r>
-              <a:rPr lang="en-US" altLang="ko-KR" sz="2800" b="1" dirty="0" smtClean="0">
+              <a:rPr lang="en-US" altLang="ko-KR" sz="2800" b="1" dirty="0">
                 <a:solidFill>
                   <a:srgbClr val="212529"/>
                 </a:solidFill>
@@ -10195,7 +10093,7 @@
               <a:t>]</a:t>
             </a:r>
             <a:r>
-              <a:rPr lang="en-US" altLang="ko-KR" sz="2800" dirty="0" smtClean="0">
+              <a:rPr lang="en-US" altLang="ko-KR" sz="2800" dirty="0">
                 <a:solidFill>
                   <a:srgbClr val="212529"/>
                 </a:solidFill>
@@ -10240,7 +10138,7 @@
               <a:t>[</a:t>
             </a:r>
             <a:r>
-              <a:rPr lang="ko-KR" altLang="en-US" sz="2800" b="1" dirty="0" err="1" smtClean="0">
+              <a:rPr lang="ko-KR" altLang="en-US" sz="2800" b="1" dirty="0" err="1">
                 <a:solidFill>
                   <a:schemeClr val="accent1"/>
                 </a:solidFill>
@@ -10255,43 +10153,25 @@
                 </a:solidFill>
                 <a:latin typeface="+mn-ea"/>
               </a:rPr>
-              <a:t>2</a:t>
-            </a:r>
-            <a:r>
-              <a:rPr lang="en-US" altLang="ko-KR" sz="2800" b="1" dirty="0" smtClean="0">
+              <a:t>2]</a:t>
+            </a:r>
+            <a:r>
+              <a:rPr lang="en-US" altLang="ko-KR" sz="2800" dirty="0">
                 <a:solidFill>
                   <a:schemeClr val="accent1"/>
                 </a:solidFill>
                 <a:latin typeface="+mn-ea"/>
               </a:rPr>
-              <a:t>]</a:t>
-            </a:r>
-            <a:r>
-              <a:rPr lang="en-US" altLang="ko-KR" sz="2800" dirty="0" smtClean="0">
-                <a:solidFill>
-                  <a:schemeClr val="accent1"/>
+              <a:t> </a:t>
+            </a:r>
+            <a:r>
+              <a:rPr lang="ko-KR" altLang="en-US" sz="2800" dirty="0">
+                <a:solidFill>
+                  <a:srgbClr val="212529"/>
                 </a:solidFill>
                 <a:latin typeface="+mn-ea"/>
               </a:rPr>
-              <a:t> </a:t>
-            </a:r>
-            <a:r>
-              <a:rPr lang="ko-KR" altLang="en-US" sz="2800" dirty="0" smtClean="0">
-                <a:solidFill>
-                  <a:srgbClr val="212529"/>
-                </a:solidFill>
-                <a:latin typeface="+mn-ea"/>
-              </a:rPr>
-              <a:t> </a:t>
-            </a:r>
-            <a:r>
-              <a:rPr lang="ko-KR" altLang="en-US" sz="2800" dirty="0">
-                <a:solidFill>
-                  <a:srgbClr val="212529"/>
-                </a:solidFill>
-                <a:latin typeface="+mn-ea"/>
-              </a:rPr>
-              <a:t>진행</a:t>
+              <a:t> 진행</a:t>
             </a:r>
           </a:p>
         </p:txBody>
@@ -10415,13 +10295,6 @@
   <p:clrMapOvr>
     <a:masterClrMapping/>
   </p:clrMapOvr>
-  <p:timing>
-    <p:tnLst>
-      <p:par>
-        <p:cTn id="1" dur="indefinite" restart="never" nodeType="tmRoot"/>
-      </p:par>
-    </p:tnLst>
-  </p:timing>
 </p:sld>
 </file>
 
@@ -10644,13 +10517,6 @@
   <p:clrMapOvr>
     <a:masterClrMapping/>
   </p:clrMapOvr>
-  <p:timing>
-    <p:tnLst>
-      <p:par>
-        <p:cTn id="1" dur="indefinite" restart="never" nodeType="tmRoot"/>
-      </p:par>
-    </p:tnLst>
-  </p:timing>
 </p:sld>
 </file>
 
@@ -10900,13 +10766,6 @@
   <p:clrMapOvr>
     <a:masterClrMapping/>
   </p:clrMapOvr>
-  <p:timing>
-    <p:tnLst>
-      <p:par>
-        <p:cTn id="1" dur="indefinite" restart="never" nodeType="tmRoot"/>
-      </p:par>
-    </p:tnLst>
-  </p:timing>
 </p:sld>
 </file>
 
@@ -11340,13 +11199,6 @@
   <p:clrMapOvr>
     <a:masterClrMapping/>
   </p:clrMapOvr>
-  <p:timing>
-    <p:tnLst>
-      <p:par>
-        <p:cTn id="1" dur="indefinite" restart="never" nodeType="tmRoot"/>
-      </p:par>
-    </p:tnLst>
-  </p:timing>
 </p:sld>
 </file>
 
@@ -11490,13 +11342,6 @@
   <p:clrMapOvr>
     <a:masterClrMapping/>
   </p:clrMapOvr>
-  <p:timing>
-    <p:tnLst>
-      <p:par>
-        <p:cTn id="1" dur="indefinite" restart="never" nodeType="tmRoot"/>
-      </p:par>
-    </p:tnLst>
-  </p:timing>
 </p:sld>
 </file>
 
@@ -11574,13 +11419,6 @@
   <p:clrMapOvr>
     <a:masterClrMapping/>
   </p:clrMapOvr>
-  <p:timing>
-    <p:tnLst>
-      <p:par>
-        <p:cTn id="1" dur="indefinite" restart="never" nodeType="tmRoot"/>
-      </p:par>
-    </p:tnLst>
-  </p:timing>
 </p:sld>
 </file>
 
@@ -11705,13 +11543,6 @@
   <p:clrMapOvr>
     <a:masterClrMapping/>
   </p:clrMapOvr>
-  <p:timing>
-    <p:tnLst>
-      <p:par>
-        <p:cTn id="1" dur="indefinite" restart="never" nodeType="tmRoot"/>
-      </p:par>
-    </p:tnLst>
-  </p:timing>
 </p:sld>
 </file>
 
